--- a/figure/proposal/Workflow.pptx
+++ b/figure/proposal/Workflow.pptx
@@ -259,7 +259,7 @@
           <a:p>
             <a:fld id="{03672F9D-E2C1-489A-B170-55502968E048}" type="datetimeFigureOut">
               <a:rPr lang="zh-CN" altLang="en-US" smtClean="0"/>
-              <a:t>2026/3/9</a:t>
+              <a:t>2026/3/10</a:t>
             </a:fld>
             <a:endParaRPr lang="zh-CN" altLang="en-US"/>
           </a:p>
@@ -457,7 +457,7 @@
           <a:p>
             <a:fld id="{03672F9D-E2C1-489A-B170-55502968E048}" type="datetimeFigureOut">
               <a:rPr lang="zh-CN" altLang="en-US" smtClean="0"/>
-              <a:t>2026/3/9</a:t>
+              <a:t>2026/3/10</a:t>
             </a:fld>
             <a:endParaRPr lang="zh-CN" altLang="en-US"/>
           </a:p>
@@ -665,7 +665,7 @@
           <a:p>
             <a:fld id="{03672F9D-E2C1-489A-B170-55502968E048}" type="datetimeFigureOut">
               <a:rPr lang="zh-CN" altLang="en-US" smtClean="0"/>
-              <a:t>2026/3/9</a:t>
+              <a:t>2026/3/10</a:t>
             </a:fld>
             <a:endParaRPr lang="zh-CN" altLang="en-US"/>
           </a:p>
@@ -863,7 +863,7 @@
           <a:p>
             <a:fld id="{03672F9D-E2C1-489A-B170-55502968E048}" type="datetimeFigureOut">
               <a:rPr lang="zh-CN" altLang="en-US" smtClean="0"/>
-              <a:t>2026/3/9</a:t>
+              <a:t>2026/3/10</a:t>
             </a:fld>
             <a:endParaRPr lang="zh-CN" altLang="en-US"/>
           </a:p>
@@ -1138,7 +1138,7 @@
           <a:p>
             <a:fld id="{03672F9D-E2C1-489A-B170-55502968E048}" type="datetimeFigureOut">
               <a:rPr lang="zh-CN" altLang="en-US" smtClean="0"/>
-              <a:t>2026/3/9</a:t>
+              <a:t>2026/3/10</a:t>
             </a:fld>
             <a:endParaRPr lang="zh-CN" altLang="en-US"/>
           </a:p>
@@ -1403,7 +1403,7 @@
           <a:p>
             <a:fld id="{03672F9D-E2C1-489A-B170-55502968E048}" type="datetimeFigureOut">
               <a:rPr lang="zh-CN" altLang="en-US" smtClean="0"/>
-              <a:t>2026/3/9</a:t>
+              <a:t>2026/3/10</a:t>
             </a:fld>
             <a:endParaRPr lang="zh-CN" altLang="en-US"/>
           </a:p>
@@ -1815,7 +1815,7 @@
           <a:p>
             <a:fld id="{03672F9D-E2C1-489A-B170-55502968E048}" type="datetimeFigureOut">
               <a:rPr lang="zh-CN" altLang="en-US" smtClean="0"/>
-              <a:t>2026/3/9</a:t>
+              <a:t>2026/3/10</a:t>
             </a:fld>
             <a:endParaRPr lang="zh-CN" altLang="en-US"/>
           </a:p>
@@ -1956,7 +1956,7 @@
           <a:p>
             <a:fld id="{03672F9D-E2C1-489A-B170-55502968E048}" type="datetimeFigureOut">
               <a:rPr lang="zh-CN" altLang="en-US" smtClean="0"/>
-              <a:t>2026/3/9</a:t>
+              <a:t>2026/3/10</a:t>
             </a:fld>
             <a:endParaRPr lang="zh-CN" altLang="en-US"/>
           </a:p>
@@ -2069,7 +2069,7 @@
           <a:p>
             <a:fld id="{03672F9D-E2C1-489A-B170-55502968E048}" type="datetimeFigureOut">
               <a:rPr lang="zh-CN" altLang="en-US" smtClean="0"/>
-              <a:t>2026/3/9</a:t>
+              <a:t>2026/3/10</a:t>
             </a:fld>
             <a:endParaRPr lang="zh-CN" altLang="en-US"/>
           </a:p>
@@ -2380,7 +2380,7 @@
           <a:p>
             <a:fld id="{03672F9D-E2C1-489A-B170-55502968E048}" type="datetimeFigureOut">
               <a:rPr lang="zh-CN" altLang="en-US" smtClean="0"/>
-              <a:t>2026/3/9</a:t>
+              <a:t>2026/3/10</a:t>
             </a:fld>
             <a:endParaRPr lang="zh-CN" altLang="en-US"/>
           </a:p>
@@ -2668,7 +2668,7 @@
           <a:p>
             <a:fld id="{03672F9D-E2C1-489A-B170-55502968E048}" type="datetimeFigureOut">
               <a:rPr lang="zh-CN" altLang="en-US" smtClean="0"/>
-              <a:t>2026/3/9</a:t>
+              <a:t>2026/3/10</a:t>
             </a:fld>
             <a:endParaRPr lang="zh-CN" altLang="en-US"/>
           </a:p>
@@ -2909,7 +2909,7 @@
           <a:p>
             <a:fld id="{03672F9D-E2C1-489A-B170-55502968E048}" type="datetimeFigureOut">
               <a:rPr lang="zh-CN" altLang="en-US" smtClean="0"/>
-              <a:t>2026/3/9</a:t>
+              <a:t>2026/3/10</a:t>
             </a:fld>
             <a:endParaRPr lang="zh-CN" altLang="en-US"/>
           </a:p>
@@ -4715,8 +4715,8 @@
         </p:nvSpPr>
         <p:spPr>
           <a:xfrm>
-            <a:off x="2558269" y="868134"/>
-            <a:ext cx="1812222" cy="369332"/>
+            <a:off x="2392925" y="868134"/>
+            <a:ext cx="2049388" cy="369332"/>
           </a:xfrm>
           <a:prstGeom prst="rect">
             <a:avLst/>
@@ -4736,7 +4736,7 @@
             </a:r>
             <a:r>
               <a:rPr lang="zh-CN" altLang="en-US" dirty="0"/>
-              <a:t>寄存器列表</a:t>
+              <a:t>时序单元列表</a:t>
             </a:r>
           </a:p>
         </p:txBody>

--- a/figure/proposal/Workflow.pptx
+++ b/figure/proposal/Workflow.pptx
@@ -259,7 +259,7 @@
           <a:p>
             <a:fld id="{03672F9D-E2C1-489A-B170-55502968E048}" type="datetimeFigureOut">
               <a:rPr lang="zh-CN" altLang="en-US" smtClean="0"/>
-              <a:t>2026/3/10</a:t>
+              <a:t>2026/3/15</a:t>
             </a:fld>
             <a:endParaRPr lang="zh-CN" altLang="en-US"/>
           </a:p>
@@ -457,7 +457,7 @@
           <a:p>
             <a:fld id="{03672F9D-E2C1-489A-B170-55502968E048}" type="datetimeFigureOut">
               <a:rPr lang="zh-CN" altLang="en-US" smtClean="0"/>
-              <a:t>2026/3/10</a:t>
+              <a:t>2026/3/15</a:t>
             </a:fld>
             <a:endParaRPr lang="zh-CN" altLang="en-US"/>
           </a:p>
@@ -665,7 +665,7 @@
           <a:p>
             <a:fld id="{03672F9D-E2C1-489A-B170-55502968E048}" type="datetimeFigureOut">
               <a:rPr lang="zh-CN" altLang="en-US" smtClean="0"/>
-              <a:t>2026/3/10</a:t>
+              <a:t>2026/3/15</a:t>
             </a:fld>
             <a:endParaRPr lang="zh-CN" altLang="en-US"/>
           </a:p>
@@ -863,7 +863,7 @@
           <a:p>
             <a:fld id="{03672F9D-E2C1-489A-B170-55502968E048}" type="datetimeFigureOut">
               <a:rPr lang="zh-CN" altLang="en-US" smtClean="0"/>
-              <a:t>2026/3/10</a:t>
+              <a:t>2026/3/15</a:t>
             </a:fld>
             <a:endParaRPr lang="zh-CN" altLang="en-US"/>
           </a:p>
@@ -1138,7 +1138,7 @@
           <a:p>
             <a:fld id="{03672F9D-E2C1-489A-B170-55502968E048}" type="datetimeFigureOut">
               <a:rPr lang="zh-CN" altLang="en-US" smtClean="0"/>
-              <a:t>2026/3/10</a:t>
+              <a:t>2026/3/15</a:t>
             </a:fld>
             <a:endParaRPr lang="zh-CN" altLang="en-US"/>
           </a:p>
@@ -1403,7 +1403,7 @@
           <a:p>
             <a:fld id="{03672F9D-E2C1-489A-B170-55502968E048}" type="datetimeFigureOut">
               <a:rPr lang="zh-CN" altLang="en-US" smtClean="0"/>
-              <a:t>2026/3/10</a:t>
+              <a:t>2026/3/15</a:t>
             </a:fld>
             <a:endParaRPr lang="zh-CN" altLang="en-US"/>
           </a:p>
@@ -1815,7 +1815,7 @@
           <a:p>
             <a:fld id="{03672F9D-E2C1-489A-B170-55502968E048}" type="datetimeFigureOut">
               <a:rPr lang="zh-CN" altLang="en-US" smtClean="0"/>
-              <a:t>2026/3/10</a:t>
+              <a:t>2026/3/15</a:t>
             </a:fld>
             <a:endParaRPr lang="zh-CN" altLang="en-US"/>
           </a:p>
@@ -1956,7 +1956,7 @@
           <a:p>
             <a:fld id="{03672F9D-E2C1-489A-B170-55502968E048}" type="datetimeFigureOut">
               <a:rPr lang="zh-CN" altLang="en-US" smtClean="0"/>
-              <a:t>2026/3/10</a:t>
+              <a:t>2026/3/15</a:t>
             </a:fld>
             <a:endParaRPr lang="zh-CN" altLang="en-US"/>
           </a:p>
@@ -2069,7 +2069,7 @@
           <a:p>
             <a:fld id="{03672F9D-E2C1-489A-B170-55502968E048}" type="datetimeFigureOut">
               <a:rPr lang="zh-CN" altLang="en-US" smtClean="0"/>
-              <a:t>2026/3/10</a:t>
+              <a:t>2026/3/15</a:t>
             </a:fld>
             <a:endParaRPr lang="zh-CN" altLang="en-US"/>
           </a:p>
@@ -2380,7 +2380,7 @@
           <a:p>
             <a:fld id="{03672F9D-E2C1-489A-B170-55502968E048}" type="datetimeFigureOut">
               <a:rPr lang="zh-CN" altLang="en-US" smtClean="0"/>
-              <a:t>2026/3/10</a:t>
+              <a:t>2026/3/15</a:t>
             </a:fld>
             <a:endParaRPr lang="zh-CN" altLang="en-US"/>
           </a:p>
@@ -2668,7 +2668,7 @@
           <a:p>
             <a:fld id="{03672F9D-E2C1-489A-B170-55502968E048}" type="datetimeFigureOut">
               <a:rPr lang="zh-CN" altLang="en-US" smtClean="0"/>
-              <a:t>2026/3/10</a:t>
+              <a:t>2026/3/15</a:t>
             </a:fld>
             <a:endParaRPr lang="zh-CN" altLang="en-US"/>
           </a:p>
@@ -2909,7 +2909,7 @@
           <a:p>
             <a:fld id="{03672F9D-E2C1-489A-B170-55502968E048}" type="datetimeFigureOut">
               <a:rPr lang="zh-CN" altLang="en-US" smtClean="0"/>
-              <a:t>2026/3/10</a:t>
+              <a:t>2026/3/15</a:t>
             </a:fld>
             <a:endParaRPr lang="zh-CN" altLang="en-US"/>
           </a:p>
@@ -3862,7 +3862,7 @@
           <a:prstGeom prst="line">
             <a:avLst/>
           </a:prstGeom>
-          <a:ln w="19050">
+          <a:ln w="28575">
             <a:solidFill>
               <a:schemeClr val="tx1"/>
             </a:solidFill>
@@ -3938,7 +3938,7 @@
                   <a:schemeClr val="tx1"/>
                 </a:solidFill>
               </a:rPr>
-              <a:t>CVA6</a:t>
+              <a:t>Ibex</a:t>
             </a:r>
             <a:endParaRPr lang="zh-CN" altLang="en-US" dirty="0">
               <a:solidFill>
@@ -4003,7 +4003,7 @@
                   <a:schemeClr val="tx1"/>
                 </a:solidFill>
               </a:rPr>
-              <a:t>Ibex</a:t>
+              <a:t>CVA6</a:t>
             </a:r>
             <a:endParaRPr lang="zh-CN" altLang="en-US" dirty="0">
               <a:solidFill>
@@ -4101,7 +4101,7 @@
           <a:prstGeom prst="line">
             <a:avLst/>
           </a:prstGeom>
-          <a:ln w="19050">
+          <a:ln w="28575">
             <a:solidFill>
               <a:schemeClr val="tx1"/>
             </a:solidFill>
@@ -4145,7 +4145,7 @@
           <a:prstGeom prst="line">
             <a:avLst/>
           </a:prstGeom>
-          <a:ln w="19050">
+          <a:ln w="28575">
             <a:solidFill>
               <a:schemeClr val="tx1"/>
             </a:solidFill>
@@ -4189,7 +4189,7 @@
           <a:prstGeom prst="line">
             <a:avLst/>
           </a:prstGeom>
-          <a:ln w="19050">
+          <a:ln w="28575">
             <a:solidFill>
               <a:schemeClr val="tx1"/>
             </a:solidFill>
@@ -4276,7 +4276,7 @@
           <a:prstGeom prst="straightConnector1">
             <a:avLst/>
           </a:prstGeom>
-          <a:ln w="19050">
+          <a:ln w="28575">
             <a:solidFill>
               <a:schemeClr val="tx1"/>
             </a:solidFill>
@@ -4298,8 +4298,8 @@
           </a:fontRef>
         </p:style>
       </p:cxnSp>
-      <mc:AlternateContent xmlns:mc="http://schemas.openxmlformats.org/markup-compatibility/2006" xmlns:a14="http://schemas.microsoft.com/office/drawing/2010/main">
-        <mc:Choice Requires="a14">
+      <mc:AlternateContent xmlns:mc="http://schemas.openxmlformats.org/markup-compatibility/2006">
+        <mc:Choice xmlns:a14="http://schemas.microsoft.com/office/drawing/2010/main" Requires="a14">
           <p:sp>
             <p:nvSpPr>
               <p:cNvPr id="45" name="矩形: 圆角 44">
@@ -4314,7 +4314,7 @@
             </p:nvSpPr>
             <p:spPr>
               <a:xfrm>
-                <a:off x="7936666" y="1797544"/>
+                <a:off x="7569802" y="1492169"/>
                 <a:ext cx="1273578" cy="721095"/>
               </a:xfrm>
               <a:prstGeom prst="roundRect">
@@ -4385,7 +4385,7 @@
             </p:txBody>
           </p:sp>
         </mc:Choice>
-        <mc:Fallback xmlns="">
+        <mc:Fallback>
           <p:sp>
             <p:nvSpPr>
               <p:cNvPr id="45" name="矩形: 圆角 44">
@@ -4402,7 +4402,7 @@
             </p:nvSpPr>
             <p:spPr>
               <a:xfrm>
-                <a:off x="7936666" y="1797544"/>
+                <a:off x="7569802" y="1492169"/>
                 <a:ext cx="1273578" cy="721095"/>
               </a:xfrm>
               <a:prstGeom prst="roundRect">
@@ -4446,19 +4446,18 @@
           </p:cNvPr>
           <p:cNvCxnSpPr>
             <a:cxnSpLocks/>
-            <a:stCxn id="4" idx="3"/>
           </p:cNvCxnSpPr>
           <p:nvPr/>
         </p:nvCxnSpPr>
         <p:spPr>
           <a:xfrm>
-            <a:off x="5010318" y="3568531"/>
+            <a:off x="5010318" y="3352941"/>
             <a:ext cx="835410" cy="0"/>
           </a:xfrm>
           <a:prstGeom prst="line">
             <a:avLst/>
           </a:prstGeom>
-          <a:ln w="19050">
+          <a:ln w="28575">
             <a:solidFill>
               <a:schemeClr val="tx1"/>
             </a:solidFill>
@@ -4495,13 +4494,13 @@
         </p:nvCxnSpPr>
         <p:spPr>
           <a:xfrm>
-            <a:off x="5846857" y="2169087"/>
-            <a:ext cx="0" cy="2927899"/>
+            <a:off x="5846857" y="1852716"/>
+            <a:ext cx="0" cy="3244270"/>
           </a:xfrm>
           <a:prstGeom prst="line">
             <a:avLst/>
           </a:prstGeom>
-          <a:ln w="19050">
+          <a:ln w="28575">
             <a:solidFill>
               <a:schemeClr val="tx1"/>
             </a:solidFill>
@@ -4539,17 +4538,17 @@
         </p:nvCxnSpPr>
         <p:spPr>
           <a:xfrm>
-            <a:off x="5845728" y="2158092"/>
-            <a:ext cx="2090938" cy="0"/>
+            <a:off x="5845728" y="1852716"/>
+            <a:ext cx="1724074" cy="1"/>
           </a:xfrm>
           <a:prstGeom prst="straightConnector1">
             <a:avLst/>
           </a:prstGeom>
-          <a:ln w="19050">
+          <a:ln w="28575">
             <a:solidFill>
               <a:schemeClr val="tx1"/>
             </a:solidFill>
-            <a:tailEnd type="triangle"/>
+            <a:tailEnd type="triangle" w="lg" len="med"/>
           </a:ln>
         </p:spPr>
         <p:style>
@@ -4584,17 +4583,17 @@
         </p:nvCxnSpPr>
         <p:spPr>
           <a:xfrm>
-            <a:off x="5847987" y="5096985"/>
-            <a:ext cx="2088679" cy="0"/>
+            <a:off x="5831982" y="5096984"/>
+            <a:ext cx="1768702" cy="0"/>
           </a:xfrm>
           <a:prstGeom prst="straightConnector1">
             <a:avLst/>
           </a:prstGeom>
-          <a:ln w="19050">
+          <a:ln w="28575">
             <a:solidFill>
               <a:schemeClr val="tx1"/>
             </a:solidFill>
-            <a:tailEnd type="triangle"/>
+            <a:tailEnd type="triangle" w="lg" len="med"/>
           </a:ln>
         </p:spPr>
         <p:style>
@@ -4626,7 +4625,7 @@
         </p:nvSpPr>
         <p:spPr>
           <a:xfrm>
-            <a:off x="3110367" y="1263152"/>
+            <a:off x="3110367" y="1307602"/>
             <a:ext cx="708026" cy="743794"/>
           </a:xfrm>
           <a:prstGeom prst="foldedCorner">
@@ -4679,8 +4678,8 @@
         </p:nvSpPr>
         <p:spPr>
           <a:xfrm>
-            <a:off x="4964289" y="3658577"/>
-            <a:ext cx="927018" cy="646331"/>
+            <a:off x="4953574" y="3379350"/>
+            <a:ext cx="927018" cy="584775"/>
           </a:xfrm>
           <a:prstGeom prst="rect">
             <a:avLst/>
@@ -4695,7 +4694,7 @@
           <a:p>
             <a:pPr algn="ctr"/>
             <a:r>
-              <a:rPr lang="zh-CN" altLang="en-US" dirty="0"/>
+              <a:rPr lang="zh-CN" altLang="en-US" sz="1600" dirty="0"/>
               <a:t>实例化两份</a:t>
             </a:r>
           </a:p>
@@ -4715,8 +4714,8 @@
         </p:nvSpPr>
         <p:spPr>
           <a:xfrm>
-            <a:off x="2392925" y="868134"/>
-            <a:ext cx="2049388" cy="369332"/>
+            <a:off x="1935208" y="1340323"/>
+            <a:ext cx="1128060" cy="646331"/>
           </a:xfrm>
           <a:prstGeom prst="rect">
             <a:avLst/>
@@ -4757,7 +4756,7 @@
         </p:nvCxnSpPr>
         <p:spPr>
           <a:xfrm>
-            <a:off x="3154818" y="1343474"/>
+            <a:off x="3154818" y="1387924"/>
             <a:ext cx="587375" cy="0"/>
           </a:xfrm>
           <a:prstGeom prst="line">
@@ -4800,7 +4799,7 @@
         </p:nvCxnSpPr>
         <p:spPr>
           <a:xfrm>
-            <a:off x="3154818" y="1412788"/>
+            <a:off x="3154818" y="1457238"/>
             <a:ext cx="553089" cy="0"/>
           </a:xfrm>
           <a:prstGeom prst="line">
@@ -4843,7 +4842,7 @@
         </p:nvCxnSpPr>
         <p:spPr>
           <a:xfrm>
-            <a:off x="3154818" y="1486343"/>
+            <a:off x="3154818" y="1530793"/>
             <a:ext cx="484188" cy="0"/>
           </a:xfrm>
           <a:prstGeom prst="line">
@@ -4886,7 +4885,7 @@
         </p:nvCxnSpPr>
         <p:spPr>
           <a:xfrm>
-            <a:off x="3154818" y="1556196"/>
+            <a:off x="3154818" y="1600646"/>
             <a:ext cx="553089" cy="0"/>
           </a:xfrm>
           <a:prstGeom prst="line">
@@ -4929,7 +4928,7 @@
         </p:nvCxnSpPr>
         <p:spPr>
           <a:xfrm>
-            <a:off x="3154818" y="1636629"/>
+            <a:off x="3154818" y="1681079"/>
             <a:ext cx="598488" cy="0"/>
           </a:xfrm>
           <a:prstGeom prst="line">
@@ -4972,7 +4971,7 @@
         </p:nvCxnSpPr>
         <p:spPr>
           <a:xfrm>
-            <a:off x="3154818" y="1711243"/>
+            <a:off x="3154818" y="1755693"/>
             <a:ext cx="455613" cy="0"/>
           </a:xfrm>
           <a:prstGeom prst="line">
@@ -5015,7 +5014,7 @@
         </p:nvCxnSpPr>
         <p:spPr>
           <a:xfrm>
-            <a:off x="3154818" y="1784269"/>
+            <a:off x="3154818" y="1828719"/>
             <a:ext cx="515938" cy="0"/>
           </a:xfrm>
           <a:prstGeom prst="line">
@@ -5058,7 +5057,7 @@
         </p:nvCxnSpPr>
         <p:spPr>
           <a:xfrm>
-            <a:off x="3154818" y="1863643"/>
+            <a:off x="3154818" y="1908093"/>
             <a:ext cx="455613" cy="0"/>
           </a:xfrm>
           <a:prstGeom prst="line">
@@ -5099,8 +5098,8 @@
         </p:nvSpPr>
         <p:spPr>
           <a:xfrm>
-            <a:off x="3284533" y="2085329"/>
-            <a:ext cx="334014" cy="435604"/>
+            <a:off x="3284533" y="2121003"/>
+            <a:ext cx="334014" cy="399929"/>
           </a:xfrm>
           <a:prstGeom prst="upArrow">
             <a:avLst/>
@@ -5111,7 +5110,11 @@
               <a:lumOff val="80000"/>
             </a:schemeClr>
           </a:solidFill>
-          <a:ln w="19050"/>
+          <a:ln w="19050">
+            <a:solidFill>
+              <a:schemeClr val="tx1"/>
+            </a:solidFill>
+          </a:ln>
         </p:spPr>
         <p:style>
           <a:lnRef idx="2">
@@ -5152,7 +5155,7 @@
         </p:nvSpPr>
         <p:spPr>
           <a:xfrm>
-            <a:off x="3617442" y="2110739"/>
+            <a:off x="3617442" y="2154634"/>
             <a:ext cx="824871" cy="369332"/>
           </a:xfrm>
           <a:prstGeom prst="rect">
@@ -5187,14 +5190,16 @@
         </p:nvSpPr>
         <p:spPr>
           <a:xfrm>
-            <a:off x="9057607" y="3302106"/>
-            <a:ext cx="1650768" cy="709878"/>
+            <a:off x="5957704" y="2906340"/>
+            <a:ext cx="1365480" cy="884603"/>
           </a:xfrm>
           <a:prstGeom prst="diamond">
             <a:avLst/>
           </a:prstGeom>
           <a:solidFill>
-            <a:schemeClr val="bg1"/>
+            <a:srgbClr val="FFCCFF">
+              <a:alpha val="65098"/>
+            </a:srgbClr>
           </a:solidFill>
           <a:ln w="28575">
             <a:solidFill>
@@ -5251,13 +5256,13 @@
         </p:nvCxnSpPr>
         <p:spPr>
           <a:xfrm flipH="1">
-            <a:off x="9210244" y="2158091"/>
-            <a:ext cx="668553" cy="1"/>
+            <a:off x="8843380" y="1852716"/>
+            <a:ext cx="1884539" cy="1"/>
           </a:xfrm>
           <a:prstGeom prst="line">
             <a:avLst/>
           </a:prstGeom>
-          <a:ln w="19050">
+          <a:ln w="28575">
             <a:solidFill>
               <a:schemeClr val="tx1"/>
             </a:solidFill>
@@ -5294,14 +5299,14 @@
           <p:nvPr/>
         </p:nvCxnSpPr>
         <p:spPr>
-          <a:xfrm flipH="1" flipV="1">
-            <a:off x="9210244" y="5096985"/>
-            <a:ext cx="670650" cy="1"/>
+          <a:xfrm flipH="1">
+            <a:off x="8874262" y="5096984"/>
+            <a:ext cx="1853657" cy="0"/>
           </a:xfrm>
           <a:prstGeom prst="line">
             <a:avLst/>
           </a:prstGeom>
-          <a:ln w="19050">
+          <a:ln w="28575">
             <a:solidFill>
               <a:schemeClr val="tx1"/>
             </a:solidFill>
@@ -5336,7 +5341,7 @@
         </p:nvSpPr>
         <p:spPr>
           <a:xfrm>
-            <a:off x="8235705" y="2811048"/>
+            <a:off x="7868820" y="2613296"/>
             <a:ext cx="673328" cy="690950"/>
           </a:xfrm>
           <a:prstGeom prst="foldedCorner">
@@ -5391,7 +5396,7 @@
         </p:nvCxnSpPr>
         <p:spPr>
           <a:xfrm>
-            <a:off x="8274243" y="2891370"/>
+            <a:off x="7907358" y="2693618"/>
             <a:ext cx="558590" cy="0"/>
           </a:xfrm>
           <a:prstGeom prst="line">
@@ -5434,7 +5439,7 @@
         </p:nvCxnSpPr>
         <p:spPr>
           <a:xfrm>
-            <a:off x="8272563" y="2960684"/>
+            <a:off x="7905678" y="2762932"/>
             <a:ext cx="525984" cy="0"/>
           </a:xfrm>
           <a:prstGeom prst="line">
@@ -5477,7 +5482,7 @@
         </p:nvCxnSpPr>
         <p:spPr>
           <a:xfrm>
-            <a:off x="8269186" y="3034239"/>
+            <a:off x="7902301" y="2836487"/>
             <a:ext cx="460460" cy="0"/>
           </a:xfrm>
           <a:prstGeom prst="line">
@@ -5520,7 +5525,7 @@
         </p:nvCxnSpPr>
         <p:spPr>
           <a:xfrm>
-            <a:off x="8272563" y="3104092"/>
+            <a:off x="7905678" y="2906340"/>
             <a:ext cx="525984" cy="0"/>
           </a:xfrm>
           <a:prstGeom prst="line">
@@ -5563,7 +5568,7 @@
         </p:nvCxnSpPr>
         <p:spPr>
           <a:xfrm>
-            <a:off x="8274788" y="3184525"/>
+            <a:off x="7907903" y="2986773"/>
             <a:ext cx="569158" cy="0"/>
           </a:xfrm>
           <a:prstGeom prst="line">
@@ -5606,7 +5611,7 @@
         </p:nvCxnSpPr>
         <p:spPr>
           <a:xfrm>
-            <a:off x="8267786" y="3259139"/>
+            <a:off x="7900901" y="3061387"/>
             <a:ext cx="433285" cy="0"/>
           </a:xfrm>
           <a:prstGeom prst="line">
@@ -5649,7 +5654,7 @@
         </p:nvCxnSpPr>
         <p:spPr>
           <a:xfrm>
-            <a:off x="8270742" y="3332165"/>
+            <a:off x="7903857" y="3134413"/>
             <a:ext cx="490654" cy="0"/>
           </a:xfrm>
           <a:prstGeom prst="line">
@@ -5692,7 +5697,7 @@
         </p:nvCxnSpPr>
         <p:spPr>
           <a:xfrm>
-            <a:off x="8267786" y="3411539"/>
+            <a:off x="7900901" y="3213787"/>
             <a:ext cx="433285" cy="0"/>
           </a:xfrm>
           <a:prstGeom prst="line">
@@ -5735,18 +5740,18 @@
           <p:nvPr/>
         </p:nvCxnSpPr>
         <p:spPr>
-          <a:xfrm flipH="1">
-            <a:off x="9882991" y="2158091"/>
-            <a:ext cx="3482" cy="1144015"/>
+          <a:xfrm>
+            <a:off x="6640444" y="1852716"/>
+            <a:ext cx="0" cy="1053624"/>
           </a:xfrm>
           <a:prstGeom prst="straightConnector1">
             <a:avLst/>
           </a:prstGeom>
-          <a:ln w="19050">
+          <a:ln w="28575">
             <a:solidFill>
               <a:schemeClr val="tx1"/>
             </a:solidFill>
-            <a:tailEnd type="triangle"/>
+            <a:tailEnd type="triangle" w="lg" len="med"/>
           </a:ln>
         </p:spPr>
         <p:style>
@@ -5775,22 +5780,23 @@
           </p:cNvPr>
           <p:cNvCxnSpPr>
             <a:cxnSpLocks/>
+            <a:endCxn id="103" idx="2"/>
           </p:cNvCxnSpPr>
           <p:nvPr/>
         </p:nvCxnSpPr>
         <p:spPr>
           <a:xfrm flipV="1">
-            <a:off x="9886473" y="4011984"/>
-            <a:ext cx="0" cy="1085001"/>
+            <a:off x="6640444" y="3790943"/>
+            <a:ext cx="0" cy="1306039"/>
           </a:xfrm>
           <a:prstGeom prst="straightConnector1">
             <a:avLst/>
           </a:prstGeom>
-          <a:ln w="19050">
+          <a:ln w="28575">
             <a:solidFill>
               <a:schemeClr val="tx1"/>
             </a:solidFill>
-            <a:tailEnd type="triangle"/>
+            <a:tailEnd type="triangle" w="lg" len="med"/>
           </a:ln>
         </p:spPr>
         <p:style>
@@ -5808,8 +5814,8 @@
           </a:fontRef>
         </p:style>
       </p:cxnSp>
-      <mc:AlternateContent xmlns:mc="http://schemas.openxmlformats.org/markup-compatibility/2006" xmlns:a14="http://schemas.microsoft.com/office/drawing/2010/main">
-        <mc:Choice Requires="a14">
+      <mc:AlternateContent xmlns:mc="http://schemas.openxmlformats.org/markup-compatibility/2006">
+        <mc:Choice xmlns:a14="http://schemas.microsoft.com/office/drawing/2010/main" Requires="a14">
           <p:sp>
             <p:nvSpPr>
               <p:cNvPr id="151" name="矩形: 圆角 150">
@@ -5824,7 +5830,7 @@
             </p:nvSpPr>
             <p:spPr>
               <a:xfrm>
-                <a:off x="7936666" y="4736437"/>
+                <a:off x="7600684" y="4736436"/>
                 <a:ext cx="1273578" cy="721095"/>
               </a:xfrm>
               <a:prstGeom prst="roundRect">
@@ -5895,7 +5901,7 @@
             </p:txBody>
           </p:sp>
         </mc:Choice>
-        <mc:Fallback xmlns="">
+        <mc:Fallback>
           <p:sp>
             <p:nvSpPr>
               <p:cNvPr id="151" name="矩形: 圆角 150">
@@ -5912,7 +5918,7 @@
             </p:nvSpPr>
             <p:spPr>
               <a:xfrm>
-                <a:off x="7936666" y="4736437"/>
+                <a:off x="7600684" y="4736436"/>
                 <a:ext cx="1273578" cy="721095"/>
               </a:xfrm>
               <a:prstGeom prst="roundRect">
@@ -5959,7 +5965,7 @@
         </p:nvSpPr>
         <p:spPr>
           <a:xfrm>
-            <a:off x="8244562" y="3764105"/>
+            <a:off x="7901112" y="3641308"/>
             <a:ext cx="673328" cy="690950"/>
           </a:xfrm>
           <a:prstGeom prst="foldedCorner">
@@ -6014,7 +6020,7 @@
         </p:nvCxnSpPr>
         <p:spPr>
           <a:xfrm>
-            <a:off x="8283100" y="3844427"/>
+            <a:off x="7939650" y="3721630"/>
             <a:ext cx="558590" cy="0"/>
           </a:xfrm>
           <a:prstGeom prst="line">
@@ -6057,7 +6063,7 @@
         </p:nvCxnSpPr>
         <p:spPr>
           <a:xfrm>
-            <a:off x="8281420" y="3913741"/>
+            <a:off x="7937970" y="3790944"/>
             <a:ext cx="525984" cy="0"/>
           </a:xfrm>
           <a:prstGeom prst="line">
@@ -6100,7 +6106,7 @@
         </p:nvCxnSpPr>
         <p:spPr>
           <a:xfrm>
-            <a:off x="8278043" y="3987296"/>
+            <a:off x="7934593" y="3864499"/>
             <a:ext cx="460460" cy="0"/>
           </a:xfrm>
           <a:prstGeom prst="line">
@@ -6143,7 +6149,7 @@
         </p:nvCxnSpPr>
         <p:spPr>
           <a:xfrm>
-            <a:off x="8281420" y="4057149"/>
+            <a:off x="7937970" y="3934352"/>
             <a:ext cx="525984" cy="0"/>
           </a:xfrm>
           <a:prstGeom prst="line">
@@ -6186,7 +6192,7 @@
         </p:nvCxnSpPr>
         <p:spPr>
           <a:xfrm>
-            <a:off x="8283645" y="4137582"/>
+            <a:off x="7940195" y="4014785"/>
             <a:ext cx="569158" cy="0"/>
           </a:xfrm>
           <a:prstGeom prst="line">
@@ -6229,7 +6235,7 @@
         </p:nvCxnSpPr>
         <p:spPr>
           <a:xfrm>
-            <a:off x="8276643" y="4212196"/>
+            <a:off x="7933193" y="4089399"/>
             <a:ext cx="433285" cy="0"/>
           </a:xfrm>
           <a:prstGeom prst="line">
@@ -6272,7 +6278,7 @@
         </p:nvCxnSpPr>
         <p:spPr>
           <a:xfrm>
-            <a:off x="8279599" y="4285222"/>
+            <a:off x="7936149" y="4162425"/>
             <a:ext cx="490654" cy="0"/>
           </a:xfrm>
           <a:prstGeom prst="line">
@@ -6315,7 +6321,7 @@
         </p:nvCxnSpPr>
         <p:spPr>
           <a:xfrm>
-            <a:off x="8276643" y="4364596"/>
+            <a:off x="7933193" y="4241799"/>
             <a:ext cx="433285" cy="0"/>
           </a:xfrm>
           <a:prstGeom prst="line">
@@ -6352,6 +6358,7 @@
             </a:extLst>
           </p:cNvPr>
           <p:cNvCxnSpPr>
+            <a:cxnSpLocks/>
             <a:stCxn id="109" idx="0"/>
             <a:endCxn id="45" idx="2"/>
           </p:cNvCxnSpPr>
@@ -6359,8 +6366,8 @@
         </p:nvCxnSpPr>
         <p:spPr>
           <a:xfrm flipV="1">
-            <a:off x="8572369" y="2518639"/>
-            <a:ext cx="1086" cy="292409"/>
+            <a:off x="8205484" y="2213264"/>
+            <a:ext cx="1107" cy="400032"/>
           </a:xfrm>
           <a:prstGeom prst="straightConnector1">
             <a:avLst/>
@@ -6405,8 +6412,8 @@
         </p:nvCxnSpPr>
         <p:spPr>
           <a:xfrm flipH="1">
-            <a:off x="8573455" y="4455055"/>
-            <a:ext cx="7771" cy="281382"/>
+            <a:off x="8237473" y="4332258"/>
+            <a:ext cx="303" cy="404178"/>
           </a:xfrm>
           <a:prstGeom prst="straightConnector1">
             <a:avLst/>
@@ -6433,8 +6440,8 @@
           </a:fontRef>
         </p:style>
       </p:cxnSp>
-      <mc:AlternateContent xmlns:mc="http://schemas.openxmlformats.org/markup-compatibility/2006" xmlns:a14="http://schemas.microsoft.com/office/drawing/2010/main">
-        <mc:Choice Requires="a14">
+      <mc:AlternateContent xmlns:mc="http://schemas.openxmlformats.org/markup-compatibility/2006">
+        <mc:Choice xmlns:a14="http://schemas.microsoft.com/office/drawing/2010/main" Requires="a14">
           <p:sp>
             <p:nvSpPr>
               <p:cNvPr id="194" name="矩形 193">
@@ -6449,7 +6456,7 @@
             </p:nvSpPr>
             <p:spPr>
               <a:xfrm>
-                <a:off x="6166789" y="2872672"/>
+                <a:off x="8962142" y="2666617"/>
                 <a:ext cx="1596362" cy="392221"/>
               </a:xfrm>
               <a:prstGeom prst="rect">
@@ -6526,7 +6533,7 @@
             </p:txBody>
           </p:sp>
         </mc:Choice>
-        <mc:Fallback xmlns="">
+        <mc:Fallback>
           <p:sp>
             <p:nvSpPr>
               <p:cNvPr id="194" name="矩形 193">
@@ -6543,7 +6550,7 @@
             </p:nvSpPr>
             <p:spPr>
               <a:xfrm>
-                <a:off x="6166789" y="2872672"/>
+                <a:off x="8962142" y="2666617"/>
                 <a:ext cx="1596362" cy="392221"/>
               </a:xfrm>
               <a:prstGeom prst="rect">
@@ -6552,7 +6559,7 @@
               <a:blipFill>
                 <a:blip r:embed="rId4"/>
                 <a:stretch>
-                  <a:fillRect l="-379" t="-2941" b="-16176"/>
+                  <a:fillRect t="-2941" b="-17647"/>
                 </a:stretch>
               </a:blipFill>
               <a:ln w="19050">
@@ -6576,8 +6583,8 @@
           </p:sp>
         </mc:Fallback>
       </mc:AlternateContent>
-      <mc:AlternateContent xmlns:mc="http://schemas.openxmlformats.org/markup-compatibility/2006" xmlns:a14="http://schemas.microsoft.com/office/drawing/2010/main">
-        <mc:Choice Requires="a14">
+      <mc:AlternateContent xmlns:mc="http://schemas.openxmlformats.org/markup-compatibility/2006">
+        <mc:Choice xmlns:a14="http://schemas.microsoft.com/office/drawing/2010/main" Requires="a14">
           <p:sp>
             <p:nvSpPr>
               <p:cNvPr id="195" name="矩形 194">
@@ -6592,7 +6599,7 @@
             </p:nvSpPr>
             <p:spPr>
               <a:xfrm>
-                <a:off x="6166789" y="3990020"/>
+                <a:off x="8965023" y="3864089"/>
                 <a:ext cx="1593481" cy="392221"/>
               </a:xfrm>
               <a:prstGeom prst="rect">
@@ -6678,7 +6685,7 @@
             </p:txBody>
           </p:sp>
         </mc:Choice>
-        <mc:Fallback xmlns="">
+        <mc:Fallback>
           <p:sp>
             <p:nvSpPr>
               <p:cNvPr id="195" name="矩形 194">
@@ -6695,7 +6702,7 @@
             </p:nvSpPr>
             <p:spPr>
               <a:xfrm>
-                <a:off x="6166789" y="3990020"/>
+                <a:off x="8965023" y="3864089"/>
                 <a:ext cx="1593481" cy="392221"/>
               </a:xfrm>
               <a:prstGeom prst="rect">
@@ -6704,7 +6711,7 @@
               <a:blipFill>
                 <a:blip r:embed="rId5"/>
                 <a:stretch>
-                  <a:fillRect l="-2273" t="-4478" b="-17910"/>
+                  <a:fillRect l="-2273" t="-2985" b="-17910"/>
                 </a:stretch>
               </a:blipFill>
               <a:ln w="19050">
@@ -6742,7 +6749,7 @@
         </p:nvSpPr>
         <p:spPr>
           <a:xfrm>
-            <a:off x="7857227" y="2948912"/>
+            <a:off x="8631862" y="2750541"/>
             <a:ext cx="284401" cy="262821"/>
           </a:xfrm>
           <a:prstGeom prst="mathPlus">
@@ -6792,7 +6799,7 @@
         </p:nvSpPr>
         <p:spPr>
           <a:xfrm>
-            <a:off x="7857227" y="4045118"/>
+            <a:off x="8637225" y="3934352"/>
             <a:ext cx="284401" cy="262821"/>
           </a:xfrm>
           <a:prstGeom prst="mathPlus">
@@ -6838,23 +6845,23 @@
             </a:extLst>
           </p:cNvPr>
           <p:cNvCxnSpPr>
-            <a:stCxn id="103" idx="3"/>
+            <a:cxnSpLocks/>
           </p:cNvCxnSpPr>
           <p:nvPr/>
         </p:nvCxnSpPr>
         <p:spPr>
           <a:xfrm>
-            <a:off x="10708375" y="3657045"/>
+            <a:off x="10727919" y="3638624"/>
             <a:ext cx="378725" cy="0"/>
           </a:xfrm>
           <a:prstGeom prst="straightConnector1">
             <a:avLst/>
           </a:prstGeom>
-          <a:ln w="19050">
+          <a:ln w="28575">
             <a:solidFill>
               <a:schemeClr val="tx1"/>
             </a:solidFill>
-            <a:tailEnd type="triangle"/>
+            <a:tailEnd type="triangle" w="lg" len="med"/>
           </a:ln>
         </p:spPr>
         <p:style>
@@ -6947,8 +6954,8 @@
         </p:nvSpPr>
         <p:spPr>
           <a:xfrm>
-            <a:off x="8599284" y="2482659"/>
-            <a:ext cx="871015" cy="369332"/>
+            <a:off x="8200961" y="2268776"/>
+            <a:ext cx="911563" cy="369332"/>
           </a:xfrm>
           <a:prstGeom prst="rect">
             <a:avLst/>
@@ -6982,8 +6989,8 @@
         </p:nvSpPr>
         <p:spPr>
           <a:xfrm>
-            <a:off x="8585316" y="4407024"/>
-            <a:ext cx="871015" cy="369332"/>
+            <a:off x="8218945" y="4346075"/>
+            <a:ext cx="899352" cy="369332"/>
           </a:xfrm>
           <a:prstGeom prst="rect">
             <a:avLst/>
@@ -7017,8 +7024,8 @@
         </p:nvSpPr>
         <p:spPr>
           <a:xfrm>
-            <a:off x="6648450" y="3308456"/>
-            <a:ext cx="359430" cy="646331"/>
+            <a:off x="9283090" y="3070758"/>
+            <a:ext cx="359430" cy="793331"/>
           </a:xfrm>
           <a:prstGeom prst="upDownArrow">
             <a:avLst/>
@@ -7029,6 +7036,11 @@
               <a:lumOff val="80000"/>
             </a:schemeClr>
           </a:solidFill>
+          <a:ln w="19050">
+            <a:solidFill>
+              <a:schemeClr val="tx1"/>
+            </a:solidFill>
+          </a:ln>
         </p:spPr>
         <p:style>
           <a:lnRef idx="2">
@@ -7051,7 +7063,7 @@
           <a:lstStyle/>
           <a:p>
             <a:pPr algn="ctr"/>
-            <a:endParaRPr lang="zh-CN" altLang="en-US"/>
+            <a:endParaRPr lang="zh-CN" altLang="en-US" dirty="0"/>
           </a:p>
         </p:txBody>
       </p:sp>
@@ -7069,8 +7081,8 @@
         </p:nvSpPr>
         <p:spPr>
           <a:xfrm>
-            <a:off x="6938867" y="3309870"/>
-            <a:ext cx="735572" cy="646331"/>
+            <a:off x="9731224" y="3159958"/>
+            <a:ext cx="789875" cy="646331"/>
           </a:xfrm>
           <a:prstGeom prst="rect">
             <a:avLst/>
@@ -7086,7 +7098,7 @@
             <a:pPr algn="ctr"/>
             <a:r>
               <a:rPr lang="zh-CN" altLang="en-US" dirty="0"/>
-              <a:t>差分对齐</a:t>
+              <a:t>差分同步</a:t>
             </a:r>
           </a:p>
         </p:txBody>
@@ -7114,7 +7126,7 @@
           <a:prstGeom prst="straightConnector1">
             <a:avLst/>
           </a:prstGeom>
-          <a:ln w="19050">
+          <a:ln w="28575">
             <a:solidFill>
               <a:schemeClr val="tx1"/>
             </a:solidFill>
@@ -7158,7 +7170,7 @@
           <a:prstGeom prst="straightConnector1">
             <a:avLst/>
           </a:prstGeom>
-          <a:ln w="19050">
+          <a:ln w="28575">
             <a:solidFill>
               <a:schemeClr val="tx1"/>
             </a:solidFill>
@@ -7356,6 +7368,334 @@
             <a:r>
               <a:rPr lang="zh-CN" altLang="en-US" dirty="0"/>
               <a:t>反例</a:t>
+            </a:r>
+          </a:p>
+        </p:txBody>
+      </p:sp>
+      <p:cxnSp>
+        <p:nvCxnSpPr>
+          <p:cNvPr id="15" name="直接连接符 14">
+            <a:extLst>
+              <a:ext uri="{FF2B5EF4-FFF2-40B4-BE49-F238E27FC236}">
+                <a16:creationId xmlns:a16="http://schemas.microsoft.com/office/drawing/2014/main" id="{786AE24F-432F-872A-2543-25F5871984E7}"/>
+              </a:ext>
+            </a:extLst>
+          </p:cNvPr>
+          <p:cNvCxnSpPr>
+            <a:cxnSpLocks/>
+          </p:cNvCxnSpPr>
+          <p:nvPr/>
+        </p:nvCxnSpPr>
+        <p:spPr>
+          <a:xfrm>
+            <a:off x="10727919" y="1852716"/>
+            <a:ext cx="0" cy="3244268"/>
+          </a:xfrm>
+          <a:prstGeom prst="line">
+            <a:avLst/>
+          </a:prstGeom>
+          <a:ln w="28575">
+            <a:solidFill>
+              <a:schemeClr val="tx1"/>
+            </a:solidFill>
+          </a:ln>
+        </p:spPr>
+        <p:style>
+          <a:lnRef idx="1">
+            <a:schemeClr val="accent1"/>
+          </a:lnRef>
+          <a:fillRef idx="0">
+            <a:schemeClr val="accent1"/>
+          </a:fillRef>
+          <a:effectRef idx="0">
+            <a:schemeClr val="accent1"/>
+          </a:effectRef>
+          <a:fontRef idx="minor">
+            <a:schemeClr val="tx1"/>
+          </a:fontRef>
+        </p:style>
+      </p:cxnSp>
+      <p:sp>
+        <p:nvSpPr>
+          <p:cNvPr id="57" name="矩形: 圆角 56">
+            <a:extLst>
+              <a:ext uri="{FF2B5EF4-FFF2-40B4-BE49-F238E27FC236}">
+                <a16:creationId xmlns:a16="http://schemas.microsoft.com/office/drawing/2014/main" id="{953A3575-F9BB-B4C2-E787-29F064ED303A}"/>
+              </a:ext>
+            </a:extLst>
+          </p:cNvPr>
+          <p:cNvSpPr/>
+          <p:nvPr/>
+        </p:nvSpPr>
+        <p:spPr>
+          <a:xfrm>
+            <a:off x="168787" y="1181103"/>
+            <a:ext cx="4908779" cy="4413746"/>
+          </a:xfrm>
+          <a:prstGeom prst="roundRect">
+            <a:avLst>
+              <a:gd name="adj" fmla="val 7163"/>
+            </a:avLst>
+          </a:prstGeom>
+          <a:noFill/>
+          <a:ln w="19050">
+            <a:solidFill>
+              <a:schemeClr val="accent3"/>
+            </a:solidFill>
+            <a:prstDash val="dash"/>
+          </a:ln>
+        </p:spPr>
+        <p:style>
+          <a:lnRef idx="2">
+            <a:schemeClr val="accent1">
+              <a:shade val="15000"/>
+            </a:schemeClr>
+          </a:lnRef>
+          <a:fillRef idx="1">
+            <a:schemeClr val="accent1"/>
+          </a:fillRef>
+          <a:effectRef idx="0">
+            <a:schemeClr val="accent1"/>
+          </a:effectRef>
+          <a:fontRef idx="minor">
+            <a:schemeClr val="lt1"/>
+          </a:fontRef>
+        </p:style>
+        <p:txBody>
+          <a:bodyPr rtlCol="0" anchor="ctr"/>
+          <a:lstStyle/>
+          <a:p>
+            <a:pPr algn="ctr"/>
+            <a:endParaRPr lang="zh-CN" altLang="en-US"/>
+          </a:p>
+        </p:txBody>
+      </p:sp>
+      <p:sp>
+        <p:nvSpPr>
+          <p:cNvPr id="59" name="矩形: 圆角 58">
+            <a:extLst>
+              <a:ext uri="{FF2B5EF4-FFF2-40B4-BE49-F238E27FC236}">
+                <a16:creationId xmlns:a16="http://schemas.microsoft.com/office/drawing/2014/main" id="{601792EC-97F2-BC51-F644-A444552BF720}"/>
+              </a:ext>
+            </a:extLst>
+          </p:cNvPr>
+          <p:cNvSpPr/>
+          <p:nvPr/>
+        </p:nvSpPr>
+        <p:spPr>
+          <a:xfrm>
+            <a:off x="5772569" y="1187450"/>
+            <a:ext cx="1642699" cy="4400550"/>
+          </a:xfrm>
+          <a:prstGeom prst="roundRect">
+            <a:avLst>
+              <a:gd name="adj" fmla="val 10096"/>
+            </a:avLst>
+          </a:prstGeom>
+          <a:noFill/>
+          <a:ln w="19050">
+            <a:solidFill>
+              <a:schemeClr val="accent3"/>
+            </a:solidFill>
+            <a:prstDash val="dash"/>
+          </a:ln>
+        </p:spPr>
+        <p:style>
+          <a:lnRef idx="2">
+            <a:schemeClr val="accent1">
+              <a:shade val="15000"/>
+            </a:schemeClr>
+          </a:lnRef>
+          <a:fillRef idx="1">
+            <a:schemeClr val="accent1"/>
+          </a:fillRef>
+          <a:effectRef idx="0">
+            <a:schemeClr val="accent1"/>
+          </a:effectRef>
+          <a:fontRef idx="minor">
+            <a:schemeClr val="lt1"/>
+          </a:fontRef>
+        </p:style>
+        <p:txBody>
+          <a:bodyPr rtlCol="0" anchor="ctr"/>
+          <a:lstStyle/>
+          <a:p>
+            <a:pPr algn="ctr"/>
+            <a:endParaRPr lang="zh-CN" altLang="en-US"/>
+          </a:p>
+        </p:txBody>
+      </p:sp>
+      <p:sp>
+        <p:nvSpPr>
+          <p:cNvPr id="61" name="矩形: 圆角 60">
+            <a:extLst>
+              <a:ext uri="{FF2B5EF4-FFF2-40B4-BE49-F238E27FC236}">
+                <a16:creationId xmlns:a16="http://schemas.microsoft.com/office/drawing/2014/main" id="{246FA429-A668-E48C-DF8D-7D10DE0C0829}"/>
+              </a:ext>
+            </a:extLst>
+          </p:cNvPr>
+          <p:cNvSpPr/>
+          <p:nvPr/>
+        </p:nvSpPr>
+        <p:spPr>
+          <a:xfrm>
+            <a:off x="7486219" y="1174750"/>
+            <a:ext cx="3372897" cy="4419599"/>
+          </a:xfrm>
+          <a:prstGeom prst="roundRect">
+            <a:avLst>
+              <a:gd name="adj" fmla="val 7032"/>
+            </a:avLst>
+          </a:prstGeom>
+          <a:noFill/>
+          <a:ln w="19050">
+            <a:solidFill>
+              <a:schemeClr val="accent3"/>
+            </a:solidFill>
+            <a:prstDash val="dash"/>
+          </a:ln>
+        </p:spPr>
+        <p:style>
+          <a:lnRef idx="2">
+            <a:schemeClr val="accent1">
+              <a:shade val="15000"/>
+            </a:schemeClr>
+          </a:lnRef>
+          <a:fillRef idx="1">
+            <a:schemeClr val="accent1"/>
+          </a:fillRef>
+          <a:effectRef idx="0">
+            <a:schemeClr val="accent1"/>
+          </a:effectRef>
+          <a:fontRef idx="minor">
+            <a:schemeClr val="lt1"/>
+          </a:fontRef>
+        </p:style>
+        <p:txBody>
+          <a:bodyPr rtlCol="0" anchor="ctr"/>
+          <a:lstStyle/>
+          <a:p>
+            <a:pPr algn="ctr"/>
+            <a:endParaRPr lang="zh-CN" altLang="en-US"/>
+          </a:p>
+        </p:txBody>
+      </p:sp>
+      <p:sp>
+        <p:nvSpPr>
+          <p:cNvPr id="69" name="文本框 68">
+            <a:extLst>
+              <a:ext uri="{FF2B5EF4-FFF2-40B4-BE49-F238E27FC236}">
+                <a16:creationId xmlns:a16="http://schemas.microsoft.com/office/drawing/2014/main" id="{8A3E99B8-65F7-0460-936C-66597406B974}"/>
+              </a:ext>
+            </a:extLst>
+          </p:cNvPr>
+          <p:cNvSpPr txBox="1"/>
+          <p:nvPr/>
+        </p:nvSpPr>
+        <p:spPr>
+          <a:xfrm>
+            <a:off x="1935208" y="689622"/>
+            <a:ext cx="1476571" cy="461665"/>
+          </a:xfrm>
+          <a:prstGeom prst="rect">
+            <a:avLst/>
+          </a:prstGeom>
+          <a:noFill/>
+        </p:spPr>
+        <p:txBody>
+          <a:bodyPr wrap="square" rtlCol="0">
+            <a:spAutoFit/>
+          </a:bodyPr>
+          <a:lstStyle/>
+          <a:p>
+            <a:pPr algn="ctr"/>
+            <a:r>
+              <a:rPr lang="en-US" altLang="zh-CN" sz="2400" b="1" dirty="0"/>
+              <a:t>2.2.1</a:t>
+            </a:r>
+            <a:r>
+              <a:rPr lang="zh-CN" altLang="en-US" sz="2400" b="1" dirty="0"/>
+              <a:t> 节</a:t>
+            </a:r>
+          </a:p>
+        </p:txBody>
+      </p:sp>
+      <p:sp>
+        <p:nvSpPr>
+          <p:cNvPr id="70" name="文本框 69">
+            <a:extLst>
+              <a:ext uri="{FF2B5EF4-FFF2-40B4-BE49-F238E27FC236}">
+                <a16:creationId xmlns:a16="http://schemas.microsoft.com/office/drawing/2014/main" id="{A6A5D96A-9B7A-4C4F-673F-E29E3A3EEC96}"/>
+              </a:ext>
+            </a:extLst>
+          </p:cNvPr>
+          <p:cNvSpPr txBox="1"/>
+          <p:nvPr/>
+        </p:nvSpPr>
+        <p:spPr>
+          <a:xfrm>
+            <a:off x="5902158" y="681173"/>
+            <a:ext cx="1476571" cy="461665"/>
+          </a:xfrm>
+          <a:prstGeom prst="rect">
+            <a:avLst/>
+          </a:prstGeom>
+          <a:noFill/>
+        </p:spPr>
+        <p:txBody>
+          <a:bodyPr wrap="square" rtlCol="0">
+            <a:spAutoFit/>
+          </a:bodyPr>
+          <a:lstStyle/>
+          <a:p>
+            <a:pPr algn="ctr"/>
+            <a:r>
+              <a:rPr lang="en-US" altLang="zh-CN" sz="2400" b="1" dirty="0"/>
+              <a:t>2.2.2</a:t>
+            </a:r>
+            <a:r>
+              <a:rPr lang="zh-CN" altLang="en-US" sz="2400" b="1" dirty="0"/>
+              <a:t> 节</a:t>
+            </a:r>
+          </a:p>
+        </p:txBody>
+      </p:sp>
+      <p:sp>
+        <p:nvSpPr>
+          <p:cNvPr id="71" name="文本框 70">
+            <a:extLst>
+              <a:ext uri="{FF2B5EF4-FFF2-40B4-BE49-F238E27FC236}">
+                <a16:creationId xmlns:a16="http://schemas.microsoft.com/office/drawing/2014/main" id="{AF587F2A-DF01-41EB-5D31-FFA35E66854F}"/>
+              </a:ext>
+            </a:extLst>
+          </p:cNvPr>
+          <p:cNvSpPr txBox="1"/>
+          <p:nvPr/>
+        </p:nvSpPr>
+        <p:spPr>
+          <a:xfrm>
+            <a:off x="8426803" y="648927"/>
+            <a:ext cx="1476571" cy="461665"/>
+          </a:xfrm>
+          <a:prstGeom prst="rect">
+            <a:avLst/>
+          </a:prstGeom>
+          <a:noFill/>
+        </p:spPr>
+        <p:txBody>
+          <a:bodyPr wrap="square" rtlCol="0">
+            <a:spAutoFit/>
+          </a:bodyPr>
+          <a:lstStyle/>
+          <a:p>
+            <a:pPr algn="ctr"/>
+            <a:r>
+              <a:rPr lang="en-US" altLang="zh-CN" sz="2400" b="1" dirty="0"/>
+              <a:t>2.2.3</a:t>
+            </a:r>
+            <a:r>
+              <a:rPr lang="zh-CN" altLang="en-US" sz="2400" b="1" dirty="0"/>
+              <a:t> 节</a:t>
             </a:r>
           </a:p>
         </p:txBody>
